--- a/Planning docs/Slides/lesson-8-4-teacher-slides.pptx
+++ b/Planning docs/Slides/lesson-8-4-teacher-slides.pptx
@@ -4701,7 +4701,7 @@
                 <a:ea typeface="Calibri" pitchFamily="34" charset="-122"/>
                 <a:cs typeface="Calibri" pitchFamily="34" charset="-120"/>
               </a:rPr>
-              <a:t>•  What are the most important things we learned in Chapters 1–7?</a:t>
+              <a:t>•  Think about how different characters reacted to Despereaux. Which reaction surprised you the most? Why?</a:t>
             </a:r>
             <a:endParaRPr lang="en-US" sz="1500" dirty="0"/>
           </a:p>
@@ -4718,24 +4718,7 @@
                 <a:ea typeface="Calibri" pitchFamily="34" charset="-122"/>
                 <a:cs typeface="Calibri" pitchFamily="34" charset="-120"/>
               </a:rPr>
-              <a:t>•  How did different characters each see Despereaux differently?</a:t>
-            </a:r>
-            <a:endParaRPr lang="en-US" sz="1500" dirty="0"/>
-          </a:p>
-          <a:p>
-            <a:pPr indent="0" marL="0">
-              <a:buNone/>
-            </a:pPr>
-            <a:r>
-              <a:rPr lang="en-US" sz="1500" dirty="0">
-                <a:solidFill>
-                  <a:srgbClr val="1E293B"/>
-                </a:solidFill>
-                <a:latin typeface="Calibri" pitchFamily="34" charset="0"/>
-                <a:ea typeface="Calibri" pitchFamily="34" charset="-122"/>
-                <a:cs typeface="Calibri" pitchFamily="34" charset="-120"/>
-              </a:rPr>
-              <a:t>•  What problem is building?</a:t>
+              <a:t>•  Despereaux loves light, music, and stories instead of crumbs. Is being different a strength or a weakness for him? Explain.</a:t>
             </a:r>
             <a:endParaRPr lang="en-US" sz="1500" dirty="0"/>
           </a:p>
